--- a/Thesis_presentation_Anastasija_Zubkova.pptx
+++ b/Thesis_presentation_Anastasija_Zubkova.pptx
@@ -2293,7 +2293,7 @@
           <a:p>
             <a:r>
               <a:rPr lang="en-GB" dirty="0"/>
-              <a:t>“This slide shows the empirical basis of the study. The analysis did not start from one ready-made modelling dataset. Instead, it started from read-only access to a reporting database that had to be explored and structured programmatically.”</a:t>
+              <a:t>“The analysis did not start from one ready-made modelling dataset. Instead, it started from read-only access to a reporting database that had to be explored and structured programmatically.”</a:t>
             </a:r>
           </a:p>
           <a:p>
@@ -11707,11 +11707,7 @@
           <a:p>
             <a:r>
               <a:rPr lang="en-GB" sz="2200" dirty="0"/>
-              <a:t>The thesis therefore develops an intelligent, control-oriented framework for real telecom </a:t>
-            </a:r>
-            <a:r>
-              <a:rPr lang="en-GB" sz="2200"/>
-              <a:t>operating conditions</a:t>
+              <a:t>The thesis therefore develops an intelligent, control-oriented framework for real telecom operating conditions</a:t>
             </a:r>
             <a:endParaRPr lang="en-LV" sz="2200" dirty="0"/>
           </a:p>
